--- a/99.ppt/Ch5. 실무형 심화개발.pptx
+++ b/99.ppt/Ch5. 실무형 심화개발.pptx
@@ -5,29 +5,30 @@
     <p:sldMasterId id="2147483674" r:id="rId1"/>
   </p:sldMasterIdLst>
   <p:notesMasterIdLst>
-    <p:notesMasterId r:id="rId22"/>
+    <p:notesMasterId r:id="rId23"/>
   </p:notesMasterIdLst>
   <p:sldIdLst>
-    <p:sldId id="256" r:id="rId2"/>
-    <p:sldId id="332" r:id="rId3"/>
-    <p:sldId id="315" r:id="rId4"/>
-    <p:sldId id="295" r:id="rId5"/>
-    <p:sldId id="316" r:id="rId6"/>
-    <p:sldId id="296" r:id="rId7"/>
-    <p:sldId id="317" r:id="rId8"/>
-    <p:sldId id="298" r:id="rId9"/>
-    <p:sldId id="319" r:id="rId10"/>
-    <p:sldId id="302" r:id="rId11"/>
-    <p:sldId id="322" r:id="rId12"/>
-    <p:sldId id="323" r:id="rId13"/>
-    <p:sldId id="303" r:id="rId14"/>
-    <p:sldId id="324" r:id="rId15"/>
-    <p:sldId id="325" r:id="rId16"/>
-    <p:sldId id="262" r:id="rId17"/>
-    <p:sldId id="330" r:id="rId18"/>
-    <p:sldId id="329" r:id="rId19"/>
-    <p:sldId id="331" r:id="rId20"/>
-    <p:sldId id="328" r:id="rId21"/>
+    <p:sldId id="334" r:id="rId2"/>
+    <p:sldId id="256" r:id="rId3"/>
+    <p:sldId id="332" r:id="rId4"/>
+    <p:sldId id="315" r:id="rId5"/>
+    <p:sldId id="295" r:id="rId6"/>
+    <p:sldId id="316" r:id="rId7"/>
+    <p:sldId id="296" r:id="rId8"/>
+    <p:sldId id="317" r:id="rId9"/>
+    <p:sldId id="298" r:id="rId10"/>
+    <p:sldId id="319" r:id="rId11"/>
+    <p:sldId id="302" r:id="rId12"/>
+    <p:sldId id="322" r:id="rId13"/>
+    <p:sldId id="323" r:id="rId14"/>
+    <p:sldId id="303" r:id="rId15"/>
+    <p:sldId id="324" r:id="rId16"/>
+    <p:sldId id="325" r:id="rId17"/>
+    <p:sldId id="262" r:id="rId18"/>
+    <p:sldId id="330" r:id="rId19"/>
+    <p:sldId id="329" r:id="rId20"/>
+    <p:sldId id="331" r:id="rId21"/>
+    <p:sldId id="328" r:id="rId22"/>
   </p:sldIdLst>
   <p:sldSz cx="9144000" cy="5143500" type="screen16x9"/>
   <p:notesSz cx="6858000" cy="9144000"/>
@@ -230,7 +231,7 @@
           <a:p>
             <a:fld id="{9B770909-2C76-4DF9-BB76-4EE283593418}" type="datetimeFigureOut">
               <a:rPr lang="ko-KR" altLang="en-US" smtClean="0"/>
-              <a:t>2024-09-08</a:t>
+              <a:t>2024-10-26</a:t>
             </a:fld>
             <a:endParaRPr lang="ko-KR" altLang="en-US"/>
           </a:p>
@@ -899,7 +900,7 @@
           <a:p>
             <a:fld id="{4F243B46-72FF-4656-838A-691B9EB329E3}" type="slidenum">
               <a:rPr lang="ko-KR" altLang="en-US" smtClean="0"/>
-              <a:t>1</a:t>
+              <a:t>2</a:t>
             </a:fld>
             <a:endParaRPr lang="ko-KR" altLang="en-US"/>
           </a:p>
@@ -1467,7 +1468,7 @@
           <a:p>
             <a:fld id="{4F243B46-72FF-4656-838A-691B9EB329E3}" type="slidenum">
               <a:rPr lang="ko-KR" altLang="en-US" smtClean="0"/>
-              <a:t>10</a:t>
+              <a:t>11</a:t>
             </a:fld>
             <a:endParaRPr lang="ko-KR" altLang="en-US"/>
           </a:p>
@@ -1603,7 +1604,7 @@
           <a:p>
             <a:fld id="{4F243B46-72FF-4656-838A-691B9EB329E3}" type="slidenum">
               <a:rPr lang="ko-KR" altLang="en-US" smtClean="0"/>
-              <a:t>11</a:t>
+              <a:t>12</a:t>
             </a:fld>
             <a:endParaRPr lang="ko-KR" altLang="en-US"/>
           </a:p>
@@ -1703,7 +1704,7 @@
           <a:p>
             <a:fld id="{4F243B46-72FF-4656-838A-691B9EB329E3}" type="slidenum">
               <a:rPr lang="ko-KR" altLang="en-US" smtClean="0"/>
-              <a:t>12</a:t>
+              <a:t>13</a:t>
             </a:fld>
             <a:endParaRPr lang="ko-KR" altLang="en-US"/>
           </a:p>
@@ -2116,7 +2117,7 @@
           <a:p>
             <a:fld id="{4F243B46-72FF-4656-838A-691B9EB329E3}" type="slidenum">
               <a:rPr lang="ko-KR" altLang="en-US" smtClean="0"/>
-              <a:t>13</a:t>
+              <a:t>14</a:t>
             </a:fld>
             <a:endParaRPr lang="ko-KR" altLang="en-US"/>
           </a:p>
@@ -2255,7 +2256,7 @@
           <a:p>
             <a:fld id="{4F243B46-72FF-4656-838A-691B9EB329E3}" type="slidenum">
               <a:rPr lang="ko-KR" altLang="en-US" smtClean="0"/>
-              <a:t>14</a:t>
+              <a:t>15</a:t>
             </a:fld>
             <a:endParaRPr lang="ko-KR" altLang="en-US"/>
           </a:p>
@@ -2355,7 +2356,7 @@
           <a:p>
             <a:fld id="{4F243B46-72FF-4656-838A-691B9EB329E3}" type="slidenum">
               <a:rPr lang="ko-KR" altLang="en-US" smtClean="0"/>
-              <a:t>15</a:t>
+              <a:t>16</a:t>
             </a:fld>
             <a:endParaRPr lang="ko-KR" altLang="en-US"/>
           </a:p>
@@ -2731,7 +2732,7 @@
           <a:p>
             <a:fld id="{4F243B46-72FF-4656-838A-691B9EB329E3}" type="slidenum">
               <a:rPr lang="ko-KR" altLang="en-US" smtClean="0"/>
-              <a:t>16</a:t>
+              <a:t>17</a:t>
             </a:fld>
             <a:endParaRPr lang="ko-KR" altLang="en-US"/>
           </a:p>
@@ -2851,7 +2852,7 @@
           <a:p>
             <a:fld id="{4F243B46-72FF-4656-838A-691B9EB329E3}" type="slidenum">
               <a:rPr lang="ko-KR" altLang="en-US" smtClean="0"/>
-              <a:t>17</a:t>
+              <a:t>18</a:t>
             </a:fld>
             <a:endParaRPr lang="ko-KR" altLang="en-US"/>
           </a:p>
@@ -2950,7 +2951,7 @@
           <a:p>
             <a:fld id="{4F243B46-72FF-4656-838A-691B9EB329E3}" type="slidenum">
               <a:rPr lang="ko-KR" altLang="en-US" smtClean="0"/>
-              <a:t>18</a:t>
+              <a:t>19</a:t>
             </a:fld>
             <a:endParaRPr lang="ko-KR" altLang="en-US"/>
           </a:p>
@@ -3117,7 +3118,7 @@
           <a:p>
             <a:fld id="{4F243B46-72FF-4656-838A-691B9EB329E3}" type="slidenum">
               <a:rPr lang="ko-KR" altLang="en-US" smtClean="0"/>
-              <a:t>19</a:t>
+              <a:t>20</a:t>
             </a:fld>
             <a:endParaRPr lang="ko-KR" altLang="en-US"/>
           </a:p>
@@ -4092,7 +4093,7 @@
           <a:p>
             <a:fld id="{4F243B46-72FF-4656-838A-691B9EB329E3}" type="slidenum">
               <a:rPr lang="ko-KR" altLang="en-US" smtClean="0"/>
-              <a:t>2</a:t>
+              <a:t>3</a:t>
             </a:fld>
             <a:endParaRPr lang="ko-KR" altLang="en-US"/>
           </a:p>
@@ -4334,7 +4335,7 @@
           <a:p>
             <a:fld id="{4F243B46-72FF-4656-838A-691B9EB329E3}" type="slidenum">
               <a:rPr lang="ko-KR" altLang="en-US" smtClean="0"/>
-              <a:t>20</a:t>
+              <a:t>21</a:t>
             </a:fld>
             <a:endParaRPr lang="ko-KR" altLang="en-US"/>
           </a:p>
@@ -4454,7 +4455,7 @@
           <a:p>
             <a:fld id="{4F243B46-72FF-4656-838A-691B9EB329E3}" type="slidenum">
               <a:rPr lang="ko-KR" altLang="en-US" smtClean="0"/>
-              <a:t>3</a:t>
+              <a:t>4</a:t>
             </a:fld>
             <a:endParaRPr lang="ko-KR" altLang="en-US"/>
           </a:p>
@@ -4718,7 +4719,7 @@
           <a:p>
             <a:fld id="{4F243B46-72FF-4656-838A-691B9EB329E3}" type="slidenum">
               <a:rPr lang="ko-KR" altLang="en-US" smtClean="0"/>
-              <a:t>4</a:t>
+              <a:t>5</a:t>
             </a:fld>
             <a:endParaRPr lang="ko-KR" altLang="en-US"/>
           </a:p>
@@ -4828,7 +4829,7 @@
           <a:p>
             <a:fld id="{4F243B46-72FF-4656-838A-691B9EB329E3}" type="slidenum">
               <a:rPr lang="ko-KR" altLang="en-US" smtClean="0"/>
-              <a:t>5</a:t>
+              <a:t>6</a:t>
             </a:fld>
             <a:endParaRPr lang="ko-KR" altLang="en-US"/>
           </a:p>
@@ -4973,7 +4974,7 @@
           <a:p>
             <a:fld id="{4F243B46-72FF-4656-838A-691B9EB329E3}" type="slidenum">
               <a:rPr lang="ko-KR" altLang="en-US" smtClean="0"/>
-              <a:t>6</a:t>
+              <a:t>7</a:t>
             </a:fld>
             <a:endParaRPr lang="ko-KR" altLang="en-US"/>
           </a:p>
@@ -5077,7 +5078,7 @@
           <a:p>
             <a:fld id="{4F243B46-72FF-4656-838A-691B9EB329E3}" type="slidenum">
               <a:rPr lang="ko-KR" altLang="en-US" smtClean="0"/>
-              <a:t>7</a:t>
+              <a:t>8</a:t>
             </a:fld>
             <a:endParaRPr lang="ko-KR" altLang="en-US"/>
           </a:p>
@@ -5646,7 +5647,7 @@
           <a:p>
             <a:fld id="{4F243B46-72FF-4656-838A-691B9EB329E3}" type="slidenum">
               <a:rPr lang="ko-KR" altLang="en-US" smtClean="0"/>
-              <a:t>8</a:t>
+              <a:t>9</a:t>
             </a:fld>
             <a:endParaRPr lang="ko-KR" altLang="en-US"/>
           </a:p>
@@ -5783,7 +5784,7 @@
           <a:p>
             <a:fld id="{4F243B46-72FF-4656-838A-691B9EB329E3}" type="slidenum">
               <a:rPr lang="ko-KR" altLang="en-US" smtClean="0"/>
-              <a:t>9</a:t>
+              <a:t>10</a:t>
             </a:fld>
             <a:endParaRPr lang="ko-KR" altLang="en-US"/>
           </a:p>
@@ -7460,99 +7461,40 @@
           <a:chExt cx="0" cy="0"/>
         </a:xfrm>
       </p:grpSpPr>
-      <p:sp>
-        <p:nvSpPr>
-          <p:cNvPr id="2" name="제목 1">
+      <p:pic>
+        <p:nvPicPr>
+          <p:cNvPr id="9" name="그림 8">
             <a:extLst>
               <a:ext uri="{FF2B5EF4-FFF2-40B4-BE49-F238E27FC236}">
-                <a16:creationId xmlns:a16="http://schemas.microsoft.com/office/drawing/2014/main" id="{9896B29B-A1AE-E0C6-8543-753E63140B1C}"/>
+                <a16:creationId xmlns:a16="http://schemas.microsoft.com/office/drawing/2014/main" id="{1661F016-9358-EED0-CAF5-2E94C069CC74}"/>
               </a:ext>
             </a:extLst>
           </p:cNvPr>
-          <p:cNvSpPr>
-            <a:spLocks noGrp="1"/>
-          </p:cNvSpPr>
-          <p:nvPr>
-            <p:ph type="ctrTitle"/>
-          </p:nvPr>
-        </p:nvSpPr>
-        <p:spPr/>
-        <p:txBody>
-          <a:bodyPr>
-            <a:normAutofit/>
-          </a:bodyPr>
-          <a:lstStyle/>
-          <a:p>
-            <a:r>
-              <a:rPr lang="ko-KR" altLang="en-US" b="1" dirty="0"/>
-              <a:t>실무형 심화개발</a:t>
-            </a:r>
-          </a:p>
-        </p:txBody>
-      </p:sp>
-      <p:sp>
-        <p:nvSpPr>
-          <p:cNvPr id="4" name="부제목 3">
-            <a:extLst>
-              <a:ext uri="{FF2B5EF4-FFF2-40B4-BE49-F238E27FC236}">
-                <a16:creationId xmlns:a16="http://schemas.microsoft.com/office/drawing/2014/main" id="{7219E4B9-47F6-C7CA-B046-1256225C3574}"/>
-              </a:ext>
-            </a:extLst>
-          </p:cNvPr>
-          <p:cNvSpPr>
-            <a:spLocks noGrp="1"/>
-          </p:cNvSpPr>
-          <p:nvPr>
-            <p:ph type="subTitle" idx="1"/>
-          </p:nvPr>
-        </p:nvSpPr>
-        <p:spPr/>
-        <p:txBody>
-          <a:bodyPr>
-            <a:normAutofit/>
-          </a:bodyPr>
-          <a:lstStyle/>
-          <a:p>
-            <a:pPr marL="0" indent="0" algn="r">
-              <a:buNone/>
-            </a:pPr>
-            <a:r>
-              <a:rPr lang="en-US" altLang="ko-KR" dirty="0"/>
-              <a:t>1. Trace ID logging</a:t>
-            </a:r>
-            <a:endParaRPr lang="ko-KR" altLang="en-US" dirty="0"/>
-          </a:p>
-        </p:txBody>
-      </p:sp>
-      <p:sp>
-        <p:nvSpPr>
-          <p:cNvPr id="3" name="텍스트 개체 틀 2">
-            <a:extLst>
-              <a:ext uri="{FF2B5EF4-FFF2-40B4-BE49-F238E27FC236}">
-                <a16:creationId xmlns:a16="http://schemas.microsoft.com/office/drawing/2014/main" id="{04D4F324-1B52-36BC-302B-BC29D1FEE4BC}"/>
-              </a:ext>
-            </a:extLst>
-          </p:cNvPr>
-          <p:cNvSpPr>
-            <a:spLocks noGrp="1"/>
-          </p:cNvSpPr>
-          <p:nvPr>
-            <p:ph type="body" sz="quarter" idx="10"/>
-          </p:nvPr>
-        </p:nvSpPr>
-        <p:spPr/>
-        <p:txBody>
-          <a:bodyPr/>
-          <a:lstStyle/>
-          <a:p>
-            <a:endParaRPr lang="ko-KR" altLang="en-US"/>
-          </a:p>
-        </p:txBody>
-      </p:sp>
+          <p:cNvPicPr>
+            <a:picLocks noChangeAspect="1"/>
+          </p:cNvPicPr>
+          <p:nvPr/>
+        </p:nvPicPr>
+        <p:blipFill>
+          <a:blip r:embed="rId2"/>
+          <a:stretch>
+            <a:fillRect/>
+          </a:stretch>
+        </p:blipFill>
+        <p:spPr>
+          <a:xfrm>
+            <a:off x="0" y="0"/>
+            <a:ext cx="9144000" cy="5143500"/>
+          </a:xfrm>
+          <a:prstGeom prst="rect">
+            <a:avLst/>
+          </a:prstGeom>
+        </p:spPr>
+      </p:pic>
     </p:spTree>
     <p:extLst>
       <p:ext uri="{BB962C8B-B14F-4D97-AF65-F5344CB8AC3E}">
-        <p14:creationId xmlns:p14="http://schemas.microsoft.com/office/powerpoint/2010/main" val="226211511"/>
+        <p14:creationId xmlns:p14="http://schemas.microsoft.com/office/powerpoint/2010/main" val="1105196596"/>
       </p:ext>
     </p:extLst>
   </p:cSld>
@@ -7581,10 +7523,10 @@
       </p:grpSpPr>
       <p:sp>
         <p:nvSpPr>
-          <p:cNvPr id="2" name="제목 1">
+          <p:cNvPr id="4" name="제목 3">
             <a:extLst>
               <a:ext uri="{FF2B5EF4-FFF2-40B4-BE49-F238E27FC236}">
-                <a16:creationId xmlns:a16="http://schemas.microsoft.com/office/drawing/2014/main" id="{9896B29B-A1AE-E0C6-8543-753E63140B1C}"/>
+                <a16:creationId xmlns:a16="http://schemas.microsoft.com/office/drawing/2014/main" id="{AA6C3C0E-F24F-9763-AC2A-545FB7F3873E}"/>
               </a:ext>
             </a:extLst>
           </p:cNvPr>
@@ -7597,24 +7539,22 @@
         </p:nvSpPr>
         <p:spPr/>
         <p:txBody>
-          <a:bodyPr>
-            <a:normAutofit/>
-          </a:bodyPr>
+          <a:bodyPr/>
           <a:lstStyle/>
           <a:p>
             <a:r>
-              <a:rPr lang="ko-KR" altLang="en-US" b="1" dirty="0"/>
-              <a:t>실무형 심화개발</a:t>
-            </a:r>
-          </a:p>
-        </p:txBody>
-      </p:sp>
-      <p:sp>
-        <p:nvSpPr>
-          <p:cNvPr id="4" name="부제목 3">
+              <a:rPr lang="ko-KR" altLang="en-US" dirty="0"/>
+              <a:t>구현 실습</a:t>
+            </a:r>
+          </a:p>
+        </p:txBody>
+      </p:sp>
+      <p:sp>
+        <p:nvSpPr>
+          <p:cNvPr id="5" name="부제목 4">
             <a:extLst>
               <a:ext uri="{FF2B5EF4-FFF2-40B4-BE49-F238E27FC236}">
-                <a16:creationId xmlns:a16="http://schemas.microsoft.com/office/drawing/2014/main" id="{7219E4B9-47F6-C7CA-B046-1256225C3574}"/>
+                <a16:creationId xmlns:a16="http://schemas.microsoft.com/office/drawing/2014/main" id="{CAF74D28-A379-C9BB-D8F9-E3B6A7427E89}"/>
               </a:ext>
             </a:extLst>
           </p:cNvPr>
@@ -7627,47 +7567,26 @@
         </p:nvSpPr>
         <p:spPr/>
         <p:txBody>
-          <a:bodyPr>
-            <a:normAutofit/>
-          </a:bodyPr>
+          <a:bodyPr/>
           <a:lstStyle/>
           <a:p>
             <a:pPr marL="0" indent="0" algn="r">
               <a:buNone/>
             </a:pPr>
             <a:r>
-              <a:rPr lang="en-US" altLang="ko" b="1" dirty="0">
-                <a:solidFill>
-                  <a:srgbClr val="ED234B"/>
-                </a:solidFill>
-              </a:rPr>
-              <a:t>5</a:t>
-            </a:r>
-            <a:r>
-              <a:rPr lang="ko" altLang="ko-KR" b="1" dirty="0">
-                <a:solidFill>
-                  <a:srgbClr val="ED234B"/>
-                </a:solidFill>
-              </a:rPr>
-              <a:t> </a:t>
-            </a:r>
-            <a:r>
-              <a:rPr lang="en-US" altLang="ko-KR" dirty="0"/>
-              <a:t>Redis </a:t>
-            </a:r>
-            <a:r>
-              <a:rPr lang="ko-KR" altLang="en-US" dirty="0"/>
-              <a:t>연동</a:t>
-            </a:r>
-          </a:p>
-        </p:txBody>
-      </p:sp>
-      <p:sp>
-        <p:nvSpPr>
-          <p:cNvPr id="3" name="텍스트 개체 틀 2">
+              <a:rPr lang="en-US" altLang="ko-KR" dirty="0"/>
+              <a:t>Circuit Breaker</a:t>
+            </a:r>
+            <a:endParaRPr lang="ko-KR" altLang="en-US" dirty="0"/>
+          </a:p>
+        </p:txBody>
+      </p:sp>
+      <p:sp>
+        <p:nvSpPr>
+          <p:cNvPr id="2" name="텍스트 개체 틀 1">
             <a:extLst>
               <a:ext uri="{FF2B5EF4-FFF2-40B4-BE49-F238E27FC236}">
-                <a16:creationId xmlns:a16="http://schemas.microsoft.com/office/drawing/2014/main" id="{AEEEAB5D-D579-BF71-6D6D-FDFF00024CC9}"/>
+                <a16:creationId xmlns:a16="http://schemas.microsoft.com/office/drawing/2014/main" id="{825DCD00-F40B-7E40-E3B4-8B2C7BD450DB}"/>
               </a:ext>
             </a:extLst>
           </p:cNvPr>
@@ -7690,7 +7609,7 @@
     </p:spTree>
     <p:extLst>
       <p:ext uri="{BB962C8B-B14F-4D97-AF65-F5344CB8AC3E}">
-        <p14:creationId xmlns:p14="http://schemas.microsoft.com/office/powerpoint/2010/main" val="8129757"/>
+        <p14:creationId xmlns:p14="http://schemas.microsoft.com/office/powerpoint/2010/main" val="45339774"/>
       </p:ext>
     </p:extLst>
   </p:cSld>
@@ -7719,10 +7638,10 @@
       </p:grpSpPr>
       <p:sp>
         <p:nvSpPr>
-          <p:cNvPr id="4" name="제목 3">
+          <p:cNvPr id="2" name="제목 1">
             <a:extLst>
               <a:ext uri="{FF2B5EF4-FFF2-40B4-BE49-F238E27FC236}">
-                <a16:creationId xmlns:a16="http://schemas.microsoft.com/office/drawing/2014/main" id="{AA6C3C0E-F24F-9763-AC2A-545FB7F3873E}"/>
+                <a16:creationId xmlns:a16="http://schemas.microsoft.com/office/drawing/2014/main" id="{9896B29B-A1AE-E0C6-8543-753E63140B1C}"/>
               </a:ext>
             </a:extLst>
           </p:cNvPr>
@@ -7735,22 +7654,24 @@
         </p:nvSpPr>
         <p:spPr/>
         <p:txBody>
-          <a:bodyPr/>
+          <a:bodyPr>
+            <a:normAutofit/>
+          </a:bodyPr>
           <a:lstStyle/>
           <a:p>
             <a:r>
-              <a:rPr lang="ko-KR" altLang="en-US" dirty="0"/>
-              <a:t>구현 실습</a:t>
-            </a:r>
-          </a:p>
-        </p:txBody>
-      </p:sp>
-      <p:sp>
-        <p:nvSpPr>
-          <p:cNvPr id="5" name="부제목 4">
+              <a:rPr lang="ko-KR" altLang="en-US" b="1" dirty="0"/>
+              <a:t>실무형 심화개발</a:t>
+            </a:r>
+          </a:p>
+        </p:txBody>
+      </p:sp>
+      <p:sp>
+        <p:nvSpPr>
+          <p:cNvPr id="4" name="부제목 3">
             <a:extLst>
               <a:ext uri="{FF2B5EF4-FFF2-40B4-BE49-F238E27FC236}">
-                <a16:creationId xmlns:a16="http://schemas.microsoft.com/office/drawing/2014/main" id="{CAF74D28-A379-C9BB-D8F9-E3B6A7427E89}"/>
+                <a16:creationId xmlns:a16="http://schemas.microsoft.com/office/drawing/2014/main" id="{7219E4B9-47F6-C7CA-B046-1256225C3574}"/>
               </a:ext>
             </a:extLst>
           </p:cNvPr>
@@ -7763,34 +7684,36 @@
         </p:nvSpPr>
         <p:spPr/>
         <p:txBody>
-          <a:bodyPr/>
+          <a:bodyPr>
+            <a:normAutofit/>
+          </a:bodyPr>
           <a:lstStyle/>
           <a:p>
             <a:pPr marL="0" indent="0" algn="r">
               <a:buNone/>
             </a:pPr>
             <a:r>
+              <a:rPr lang="en-US" altLang="ko" b="1" dirty="0">
+                <a:solidFill>
+                  <a:srgbClr val="ED234B"/>
+                </a:solidFill>
+              </a:rPr>
+              <a:t>5</a:t>
+            </a:r>
+            <a:r>
+              <a:rPr lang="ko" altLang="ko-KR" b="1" dirty="0">
+                <a:solidFill>
+                  <a:srgbClr val="ED234B"/>
+                </a:solidFill>
+              </a:rPr>
+              <a:t> </a:t>
+            </a:r>
+            <a:r>
               <a:rPr lang="en-US" altLang="ko-KR" dirty="0"/>
               <a:t>Redis </a:t>
             </a:r>
             <a:r>
               <a:rPr lang="ko-KR" altLang="en-US" dirty="0"/>
-              <a:t>설치 및 </a:t>
-            </a:r>
-            <a:r>
-              <a:rPr lang="en-US" altLang="ko-KR" dirty="0"/>
-              <a:t>Reactive </a:t>
-            </a:r>
-            <a:r>
-              <a:rPr lang="en-US" altLang="ko-KR" dirty="0" err="1"/>
-              <a:t>redis</a:t>
-            </a:r>
-            <a:r>
-              <a:rPr lang="en-US" altLang="ko-KR" dirty="0"/>
-              <a:t> </a:t>
-            </a:r>
-            <a:r>
-              <a:rPr lang="ko-KR" altLang="en-US" dirty="0"/>
               <a:t>연동</a:t>
             </a:r>
           </a:p>
@@ -7798,10 +7721,10 @@
       </p:sp>
       <p:sp>
         <p:nvSpPr>
-          <p:cNvPr id="2" name="텍스트 개체 틀 1">
+          <p:cNvPr id="3" name="텍스트 개체 틀 2">
             <a:extLst>
               <a:ext uri="{FF2B5EF4-FFF2-40B4-BE49-F238E27FC236}">
-                <a16:creationId xmlns:a16="http://schemas.microsoft.com/office/drawing/2014/main" id="{C94066DB-63C6-9C8D-92F0-F561BCF18110}"/>
+                <a16:creationId xmlns:a16="http://schemas.microsoft.com/office/drawing/2014/main" id="{AEEEAB5D-D579-BF71-6D6D-FDFF00024CC9}"/>
               </a:ext>
             </a:extLst>
           </p:cNvPr>
@@ -7824,7 +7747,7 @@
     </p:spTree>
     <p:extLst>
       <p:ext uri="{BB962C8B-B14F-4D97-AF65-F5344CB8AC3E}">
-        <p14:creationId xmlns:p14="http://schemas.microsoft.com/office/powerpoint/2010/main" val="2668402119"/>
+        <p14:creationId xmlns:p14="http://schemas.microsoft.com/office/powerpoint/2010/main" val="8129757"/>
       </p:ext>
     </p:extLst>
   </p:cSld>
@@ -7909,7 +7832,23 @@
             </a:r>
             <a:r>
               <a:rPr lang="ko-KR" altLang="en-US" dirty="0"/>
-              <a:t>연산</a:t>
+              <a:t>설치 및 </a:t>
+            </a:r>
+            <a:r>
+              <a:rPr lang="en-US" altLang="ko-KR" dirty="0"/>
+              <a:t>Reactive </a:t>
+            </a:r>
+            <a:r>
+              <a:rPr lang="en-US" altLang="ko-KR" dirty="0" err="1"/>
+              <a:t>redis</a:t>
+            </a:r>
+            <a:r>
+              <a:rPr lang="en-US" altLang="ko-KR" dirty="0"/>
+              <a:t> </a:t>
+            </a:r>
+            <a:r>
+              <a:rPr lang="ko-KR" altLang="en-US" dirty="0"/>
+              <a:t>연동</a:t>
             </a:r>
           </a:p>
         </p:txBody>
@@ -7919,7 +7858,7 @@
           <p:cNvPr id="2" name="텍스트 개체 틀 1">
             <a:extLst>
               <a:ext uri="{FF2B5EF4-FFF2-40B4-BE49-F238E27FC236}">
-                <a16:creationId xmlns:a16="http://schemas.microsoft.com/office/drawing/2014/main" id="{9AA66682-C25D-ED81-A88B-D99F2C266175}"/>
+                <a16:creationId xmlns:a16="http://schemas.microsoft.com/office/drawing/2014/main" id="{C94066DB-63C6-9C8D-92F0-F561BCF18110}"/>
               </a:ext>
             </a:extLst>
           </p:cNvPr>
@@ -7942,7 +7881,7 @@
     </p:spTree>
     <p:extLst>
       <p:ext uri="{BB962C8B-B14F-4D97-AF65-F5344CB8AC3E}">
-        <p14:creationId xmlns:p14="http://schemas.microsoft.com/office/powerpoint/2010/main" val="660941890"/>
+        <p14:creationId xmlns:p14="http://schemas.microsoft.com/office/powerpoint/2010/main" val="2668402119"/>
       </p:ext>
     </p:extLst>
   </p:cSld>
@@ -7971,10 +7910,10 @@
       </p:grpSpPr>
       <p:sp>
         <p:nvSpPr>
-          <p:cNvPr id="2" name="제목 1">
+          <p:cNvPr id="4" name="제목 3">
             <a:extLst>
               <a:ext uri="{FF2B5EF4-FFF2-40B4-BE49-F238E27FC236}">
-                <a16:creationId xmlns:a16="http://schemas.microsoft.com/office/drawing/2014/main" id="{9896B29B-A1AE-E0C6-8543-753E63140B1C}"/>
+                <a16:creationId xmlns:a16="http://schemas.microsoft.com/office/drawing/2014/main" id="{AA6C3C0E-F24F-9763-AC2A-545FB7F3873E}"/>
               </a:ext>
             </a:extLst>
           </p:cNvPr>
@@ -7987,24 +7926,22 @@
         </p:nvSpPr>
         <p:spPr/>
         <p:txBody>
-          <a:bodyPr>
-            <a:normAutofit/>
-          </a:bodyPr>
+          <a:bodyPr/>
           <a:lstStyle/>
           <a:p>
             <a:r>
-              <a:rPr lang="ko-KR" altLang="en-US" b="1" dirty="0"/>
-              <a:t>실무형 심화개발</a:t>
-            </a:r>
-          </a:p>
-        </p:txBody>
-      </p:sp>
-      <p:sp>
-        <p:nvSpPr>
-          <p:cNvPr id="4" name="부제목 3">
+              <a:rPr lang="ko-KR" altLang="en-US" dirty="0"/>
+              <a:t>구현 실습</a:t>
+            </a:r>
+          </a:p>
+        </p:txBody>
+      </p:sp>
+      <p:sp>
+        <p:nvSpPr>
+          <p:cNvPr id="5" name="부제목 4">
             <a:extLst>
               <a:ext uri="{FF2B5EF4-FFF2-40B4-BE49-F238E27FC236}">
-                <a16:creationId xmlns:a16="http://schemas.microsoft.com/office/drawing/2014/main" id="{7219E4B9-47F6-C7CA-B046-1256225C3574}"/>
+                <a16:creationId xmlns:a16="http://schemas.microsoft.com/office/drawing/2014/main" id="{CAF74D28-A379-C9BB-D8F9-E3B6A7427E89}"/>
               </a:ext>
             </a:extLst>
           </p:cNvPr>
@@ -8017,44 +7954,29 @@
         </p:nvSpPr>
         <p:spPr/>
         <p:txBody>
-          <a:bodyPr>
-            <a:normAutofit/>
-          </a:bodyPr>
+          <a:bodyPr/>
           <a:lstStyle/>
           <a:p>
             <a:pPr marL="0" indent="0" algn="r">
               <a:buNone/>
             </a:pPr>
             <a:r>
-              <a:rPr lang="en-US" altLang="ko" b="1" dirty="0">
-                <a:solidFill>
-                  <a:srgbClr val="ED234B"/>
-                </a:solidFill>
-              </a:rPr>
-              <a:t>6</a:t>
-            </a:r>
-            <a:r>
-              <a:rPr lang="ko" altLang="ko-KR" b="1" dirty="0">
-                <a:solidFill>
-                  <a:srgbClr val="ED234B"/>
-                </a:solidFill>
-              </a:rPr>
-              <a:t> </a:t>
-            </a:r>
-            <a:r>
-              <a:rPr lang="en-US" altLang="ko-KR" dirty="0"/>
-              <a:t>Cache</a:t>
-            </a:r>
-            <a:endParaRPr lang="ko-KR" altLang="en-US" dirty="0"/>
-          </a:p>
-        </p:txBody>
-      </p:sp>
-      <p:sp>
-        <p:nvSpPr>
-          <p:cNvPr id="3" name="텍스트 개체 틀 2">
+              <a:rPr lang="en-US" altLang="ko-KR" dirty="0"/>
+              <a:t>Redis </a:t>
+            </a:r>
+            <a:r>
+              <a:rPr lang="ko-KR" altLang="en-US" dirty="0"/>
+              <a:t>연산</a:t>
+            </a:r>
+          </a:p>
+        </p:txBody>
+      </p:sp>
+      <p:sp>
+        <p:nvSpPr>
+          <p:cNvPr id="2" name="텍스트 개체 틀 1">
             <a:extLst>
               <a:ext uri="{FF2B5EF4-FFF2-40B4-BE49-F238E27FC236}">
-                <a16:creationId xmlns:a16="http://schemas.microsoft.com/office/drawing/2014/main" id="{EAD40369-0F9F-B396-481E-D1257462B8A6}"/>
+                <a16:creationId xmlns:a16="http://schemas.microsoft.com/office/drawing/2014/main" id="{9AA66682-C25D-ED81-A88B-D99F2C266175}"/>
               </a:ext>
             </a:extLst>
           </p:cNvPr>
@@ -8077,7 +7999,7 @@
     </p:spTree>
     <p:extLst>
       <p:ext uri="{BB962C8B-B14F-4D97-AF65-F5344CB8AC3E}">
-        <p14:creationId xmlns:p14="http://schemas.microsoft.com/office/powerpoint/2010/main" val="3057315199"/>
+        <p14:creationId xmlns:p14="http://schemas.microsoft.com/office/powerpoint/2010/main" val="660941890"/>
       </p:ext>
     </p:extLst>
   </p:cSld>
@@ -8106,10 +8028,10 @@
       </p:grpSpPr>
       <p:sp>
         <p:nvSpPr>
-          <p:cNvPr id="4" name="제목 3">
+          <p:cNvPr id="2" name="제목 1">
             <a:extLst>
               <a:ext uri="{FF2B5EF4-FFF2-40B4-BE49-F238E27FC236}">
-                <a16:creationId xmlns:a16="http://schemas.microsoft.com/office/drawing/2014/main" id="{AA6C3C0E-F24F-9763-AC2A-545FB7F3873E}"/>
+                <a16:creationId xmlns:a16="http://schemas.microsoft.com/office/drawing/2014/main" id="{9896B29B-A1AE-E0C6-8543-753E63140B1C}"/>
               </a:ext>
             </a:extLst>
           </p:cNvPr>
@@ -8122,22 +8044,24 @@
         </p:nvSpPr>
         <p:spPr/>
         <p:txBody>
-          <a:bodyPr/>
+          <a:bodyPr>
+            <a:normAutofit/>
+          </a:bodyPr>
           <a:lstStyle/>
           <a:p>
             <a:r>
-              <a:rPr lang="ko-KR" altLang="en-US" dirty="0"/>
-              <a:t>구현 실습</a:t>
-            </a:r>
-          </a:p>
-        </p:txBody>
-      </p:sp>
-      <p:sp>
-        <p:nvSpPr>
-          <p:cNvPr id="5" name="부제목 4">
+              <a:rPr lang="ko-KR" altLang="en-US" b="1" dirty="0"/>
+              <a:t>실무형 심화개발</a:t>
+            </a:r>
+          </a:p>
+        </p:txBody>
+      </p:sp>
+      <p:sp>
+        <p:nvSpPr>
+          <p:cNvPr id="4" name="부제목 3">
             <a:extLst>
               <a:ext uri="{FF2B5EF4-FFF2-40B4-BE49-F238E27FC236}">
-                <a16:creationId xmlns:a16="http://schemas.microsoft.com/office/drawing/2014/main" id="{CAF74D28-A379-C9BB-D8F9-E3B6A7427E89}"/>
+                <a16:creationId xmlns:a16="http://schemas.microsoft.com/office/drawing/2014/main" id="{7219E4B9-47F6-C7CA-B046-1256225C3574}"/>
               </a:ext>
             </a:extLst>
           </p:cNvPr>
@@ -8150,37 +8074,44 @@
         </p:nvSpPr>
         <p:spPr/>
         <p:txBody>
-          <a:bodyPr/>
+          <a:bodyPr>
+            <a:normAutofit/>
+          </a:bodyPr>
           <a:lstStyle/>
           <a:p>
             <a:pPr marL="0" indent="0" algn="r">
               <a:buNone/>
             </a:pPr>
             <a:r>
-              <a:rPr lang="en-US" altLang="ko-KR" dirty="0" err="1"/>
-              <a:t>ReactiveRedisTemplate</a:t>
-            </a:r>
-            <a:r>
-              <a:rPr lang="ko-KR" altLang="en-US" dirty="0"/>
-              <a:t>을 이용한 </a:t>
-            </a:r>
-            <a:r>
-              <a:rPr lang="en-US" altLang="ko-KR" dirty="0"/>
-              <a:t>cache </a:t>
-            </a:r>
-            <a:r>
-              <a:rPr lang="ko-KR" altLang="en-US" dirty="0"/>
-              <a:t>구현</a:t>
-            </a:r>
-          </a:p>
-        </p:txBody>
-      </p:sp>
-      <p:sp>
-        <p:nvSpPr>
-          <p:cNvPr id="2" name="텍스트 개체 틀 1">
+              <a:rPr lang="en-US" altLang="ko" b="1" dirty="0">
+                <a:solidFill>
+                  <a:srgbClr val="ED234B"/>
+                </a:solidFill>
+              </a:rPr>
+              <a:t>6</a:t>
+            </a:r>
+            <a:r>
+              <a:rPr lang="ko" altLang="ko-KR" b="1" dirty="0">
+                <a:solidFill>
+                  <a:srgbClr val="ED234B"/>
+                </a:solidFill>
+              </a:rPr>
+              <a:t> </a:t>
+            </a:r>
+            <a:r>
+              <a:rPr lang="en-US" altLang="ko-KR" dirty="0"/>
+              <a:t>Cache</a:t>
+            </a:r>
+            <a:endParaRPr lang="ko-KR" altLang="en-US" dirty="0"/>
+          </a:p>
+        </p:txBody>
+      </p:sp>
+      <p:sp>
+        <p:nvSpPr>
+          <p:cNvPr id="3" name="텍스트 개체 틀 2">
             <a:extLst>
               <a:ext uri="{FF2B5EF4-FFF2-40B4-BE49-F238E27FC236}">
-                <a16:creationId xmlns:a16="http://schemas.microsoft.com/office/drawing/2014/main" id="{45F2E531-84A4-1A9B-E72C-C5B1C6F7D432}"/>
+                <a16:creationId xmlns:a16="http://schemas.microsoft.com/office/drawing/2014/main" id="{EAD40369-0F9F-B396-481E-D1257462B8A6}"/>
               </a:ext>
             </a:extLst>
           </p:cNvPr>
@@ -8203,7 +8134,7 @@
     </p:spTree>
     <p:extLst>
       <p:ext uri="{BB962C8B-B14F-4D97-AF65-F5344CB8AC3E}">
-        <p14:creationId xmlns:p14="http://schemas.microsoft.com/office/powerpoint/2010/main" val="4043954338"/>
+        <p14:creationId xmlns:p14="http://schemas.microsoft.com/office/powerpoint/2010/main" val="3057315199"/>
       </p:ext>
     </p:extLst>
   </p:cSld>
@@ -8232,6 +8163,132 @@
       </p:grpSpPr>
       <p:sp>
         <p:nvSpPr>
+          <p:cNvPr id="4" name="제목 3">
+            <a:extLst>
+              <a:ext uri="{FF2B5EF4-FFF2-40B4-BE49-F238E27FC236}">
+                <a16:creationId xmlns:a16="http://schemas.microsoft.com/office/drawing/2014/main" id="{AA6C3C0E-F24F-9763-AC2A-545FB7F3873E}"/>
+              </a:ext>
+            </a:extLst>
+          </p:cNvPr>
+          <p:cNvSpPr>
+            <a:spLocks noGrp="1"/>
+          </p:cNvSpPr>
+          <p:nvPr>
+            <p:ph type="ctrTitle"/>
+          </p:nvPr>
+        </p:nvSpPr>
+        <p:spPr/>
+        <p:txBody>
+          <a:bodyPr/>
+          <a:lstStyle/>
+          <a:p>
+            <a:r>
+              <a:rPr lang="ko-KR" altLang="en-US" dirty="0"/>
+              <a:t>구현 실습</a:t>
+            </a:r>
+          </a:p>
+        </p:txBody>
+      </p:sp>
+      <p:sp>
+        <p:nvSpPr>
+          <p:cNvPr id="5" name="부제목 4">
+            <a:extLst>
+              <a:ext uri="{FF2B5EF4-FFF2-40B4-BE49-F238E27FC236}">
+                <a16:creationId xmlns:a16="http://schemas.microsoft.com/office/drawing/2014/main" id="{CAF74D28-A379-C9BB-D8F9-E3B6A7427E89}"/>
+              </a:ext>
+            </a:extLst>
+          </p:cNvPr>
+          <p:cNvSpPr>
+            <a:spLocks noGrp="1"/>
+          </p:cNvSpPr>
+          <p:nvPr>
+            <p:ph type="subTitle" idx="1"/>
+          </p:nvPr>
+        </p:nvSpPr>
+        <p:spPr/>
+        <p:txBody>
+          <a:bodyPr/>
+          <a:lstStyle/>
+          <a:p>
+            <a:pPr marL="0" indent="0" algn="r">
+              <a:buNone/>
+            </a:pPr>
+            <a:r>
+              <a:rPr lang="en-US" altLang="ko-KR" dirty="0" err="1"/>
+              <a:t>ReactiveRedisTemplate</a:t>
+            </a:r>
+            <a:r>
+              <a:rPr lang="ko-KR" altLang="en-US" dirty="0"/>
+              <a:t>을 이용한 </a:t>
+            </a:r>
+            <a:r>
+              <a:rPr lang="en-US" altLang="ko-KR" dirty="0"/>
+              <a:t>cache </a:t>
+            </a:r>
+            <a:r>
+              <a:rPr lang="ko-KR" altLang="en-US" dirty="0"/>
+              <a:t>구현</a:t>
+            </a:r>
+          </a:p>
+        </p:txBody>
+      </p:sp>
+      <p:sp>
+        <p:nvSpPr>
+          <p:cNvPr id="2" name="텍스트 개체 틀 1">
+            <a:extLst>
+              <a:ext uri="{FF2B5EF4-FFF2-40B4-BE49-F238E27FC236}">
+                <a16:creationId xmlns:a16="http://schemas.microsoft.com/office/drawing/2014/main" id="{45F2E531-84A4-1A9B-E72C-C5B1C6F7D432}"/>
+              </a:ext>
+            </a:extLst>
+          </p:cNvPr>
+          <p:cNvSpPr>
+            <a:spLocks noGrp="1"/>
+          </p:cNvSpPr>
+          <p:nvPr>
+            <p:ph type="body" sz="quarter" idx="10"/>
+          </p:nvPr>
+        </p:nvSpPr>
+        <p:spPr/>
+        <p:txBody>
+          <a:bodyPr/>
+          <a:lstStyle/>
+          <a:p>
+            <a:endParaRPr lang="ko-KR" altLang="en-US"/>
+          </a:p>
+        </p:txBody>
+      </p:sp>
+    </p:spTree>
+    <p:extLst>
+      <p:ext uri="{BB962C8B-B14F-4D97-AF65-F5344CB8AC3E}">
+        <p14:creationId xmlns:p14="http://schemas.microsoft.com/office/powerpoint/2010/main" val="4043954338"/>
+      </p:ext>
+    </p:extLst>
+  </p:cSld>
+  <p:clrMapOvr>
+    <a:masterClrMapping/>
+  </p:clrMapOvr>
+</p:sld>
+</file>
+
+<file path=ppt/slides/slide16.xml><?xml version="1.0" encoding="utf-8"?>
+<p:sld xmlns:a="http://schemas.openxmlformats.org/drawingml/2006/main" xmlns:r="http://schemas.openxmlformats.org/officeDocument/2006/relationships" xmlns:p="http://schemas.openxmlformats.org/presentationml/2006/main">
+  <p:cSld>
+    <p:spTree>
+      <p:nvGrpSpPr>
+        <p:cNvPr id="1" name=""/>
+        <p:cNvGrpSpPr/>
+        <p:nvPr/>
+      </p:nvGrpSpPr>
+      <p:grpSpPr>
+        <a:xfrm>
+          <a:off x="0" y="0"/>
+          <a:ext cx="0" cy="0"/>
+          <a:chOff x="0" y="0"/>
+          <a:chExt cx="0" cy="0"/>
+        </a:xfrm>
+      </p:grpSpPr>
+      <p:sp>
+        <p:nvSpPr>
           <p:cNvPr id="2" name="제목 1">
             <a:extLst>
               <a:ext uri="{FF2B5EF4-FFF2-40B4-BE49-F238E27FC236}">
@@ -8348,7 +8405,7 @@
 </p:sld>
 </file>
 
-<file path=ppt/slides/slide16.xml><?xml version="1.0" encoding="utf-8"?>
+<file path=ppt/slides/slide17.xml><?xml version="1.0" encoding="utf-8"?>
 <p:sld xmlns:a="http://schemas.openxmlformats.org/drawingml/2006/main" xmlns:r="http://schemas.openxmlformats.org/officeDocument/2006/relationships" xmlns:p="http://schemas.openxmlformats.org/presentationml/2006/main">
   <p:cSld>
     <p:spTree>
@@ -8511,7 +8568,7 @@
 </p:sld>
 </file>
 
-<file path=ppt/slides/slide17.xml><?xml version="1.0" encoding="utf-8"?>
+<file path=ppt/slides/slide18.xml><?xml version="1.0" encoding="utf-8"?>
 <p:sld xmlns:a="http://schemas.openxmlformats.org/drawingml/2006/main" xmlns:r="http://schemas.openxmlformats.org/officeDocument/2006/relationships" xmlns:p="http://schemas.openxmlformats.org/presentationml/2006/main">
   <p:cSld>
     <p:spTree>
@@ -8891,7 +8948,7 @@
 </p:sld>
 </file>
 
-<file path=ppt/slides/slide18.xml><?xml version="1.0" encoding="utf-8"?>
+<file path=ppt/slides/slide19.xml><?xml version="1.0" encoding="utf-8"?>
 <p:sld xmlns:a="http://schemas.openxmlformats.org/drawingml/2006/main" xmlns:r="http://schemas.openxmlformats.org/officeDocument/2006/relationships" xmlns:p="http://schemas.openxmlformats.org/presentationml/2006/main">
   <p:cSld>
     <p:spTree>
@@ -9241,7 +9298,126 @@
 </p:sld>
 </file>
 
-<file path=ppt/slides/slide19.xml><?xml version="1.0" encoding="utf-8"?>
+<file path=ppt/slides/slide2.xml><?xml version="1.0" encoding="utf-8"?>
+<p:sld xmlns:a="http://schemas.openxmlformats.org/drawingml/2006/main" xmlns:r="http://schemas.openxmlformats.org/officeDocument/2006/relationships" xmlns:p="http://schemas.openxmlformats.org/presentationml/2006/main">
+  <p:cSld>
+    <p:spTree>
+      <p:nvGrpSpPr>
+        <p:cNvPr id="1" name=""/>
+        <p:cNvGrpSpPr/>
+        <p:nvPr/>
+      </p:nvGrpSpPr>
+      <p:grpSpPr>
+        <a:xfrm>
+          <a:off x="0" y="0"/>
+          <a:ext cx="0" cy="0"/>
+          <a:chOff x="0" y="0"/>
+          <a:chExt cx="0" cy="0"/>
+        </a:xfrm>
+      </p:grpSpPr>
+      <p:sp>
+        <p:nvSpPr>
+          <p:cNvPr id="2" name="제목 1">
+            <a:extLst>
+              <a:ext uri="{FF2B5EF4-FFF2-40B4-BE49-F238E27FC236}">
+                <a16:creationId xmlns:a16="http://schemas.microsoft.com/office/drawing/2014/main" id="{9896B29B-A1AE-E0C6-8543-753E63140B1C}"/>
+              </a:ext>
+            </a:extLst>
+          </p:cNvPr>
+          <p:cNvSpPr>
+            <a:spLocks noGrp="1"/>
+          </p:cNvSpPr>
+          <p:nvPr>
+            <p:ph type="ctrTitle"/>
+          </p:nvPr>
+        </p:nvSpPr>
+        <p:spPr/>
+        <p:txBody>
+          <a:bodyPr>
+            <a:normAutofit/>
+          </a:bodyPr>
+          <a:lstStyle/>
+          <a:p>
+            <a:r>
+              <a:rPr lang="ko-KR" altLang="en-US" b="1" dirty="0"/>
+              <a:t>실무형 심화개발</a:t>
+            </a:r>
+          </a:p>
+        </p:txBody>
+      </p:sp>
+      <p:sp>
+        <p:nvSpPr>
+          <p:cNvPr id="4" name="부제목 3">
+            <a:extLst>
+              <a:ext uri="{FF2B5EF4-FFF2-40B4-BE49-F238E27FC236}">
+                <a16:creationId xmlns:a16="http://schemas.microsoft.com/office/drawing/2014/main" id="{7219E4B9-47F6-C7CA-B046-1256225C3574}"/>
+              </a:ext>
+            </a:extLst>
+          </p:cNvPr>
+          <p:cNvSpPr>
+            <a:spLocks noGrp="1"/>
+          </p:cNvSpPr>
+          <p:nvPr>
+            <p:ph type="subTitle" idx="1"/>
+          </p:nvPr>
+        </p:nvSpPr>
+        <p:spPr/>
+        <p:txBody>
+          <a:bodyPr>
+            <a:normAutofit/>
+          </a:bodyPr>
+          <a:lstStyle/>
+          <a:p>
+            <a:pPr marL="0" indent="0" algn="r">
+              <a:buNone/>
+            </a:pPr>
+            <a:r>
+              <a:rPr lang="en-US" altLang="ko-KR" dirty="0"/>
+              <a:t>1. Trace ID logging</a:t>
+            </a:r>
+            <a:endParaRPr lang="ko-KR" altLang="en-US" dirty="0"/>
+          </a:p>
+        </p:txBody>
+      </p:sp>
+      <p:sp>
+        <p:nvSpPr>
+          <p:cNvPr id="3" name="텍스트 개체 틀 2">
+            <a:extLst>
+              <a:ext uri="{FF2B5EF4-FFF2-40B4-BE49-F238E27FC236}">
+                <a16:creationId xmlns:a16="http://schemas.microsoft.com/office/drawing/2014/main" id="{04D4F324-1B52-36BC-302B-BC29D1FEE4BC}"/>
+              </a:ext>
+            </a:extLst>
+          </p:cNvPr>
+          <p:cNvSpPr>
+            <a:spLocks noGrp="1"/>
+          </p:cNvSpPr>
+          <p:nvPr>
+            <p:ph type="body" sz="quarter" idx="10"/>
+          </p:nvPr>
+        </p:nvSpPr>
+        <p:spPr/>
+        <p:txBody>
+          <a:bodyPr/>
+          <a:lstStyle/>
+          <a:p>
+            <a:endParaRPr lang="ko-KR" altLang="en-US"/>
+          </a:p>
+        </p:txBody>
+      </p:sp>
+    </p:spTree>
+    <p:extLst>
+      <p:ext uri="{BB962C8B-B14F-4D97-AF65-F5344CB8AC3E}">
+        <p14:creationId xmlns:p14="http://schemas.microsoft.com/office/powerpoint/2010/main" val="226211511"/>
+      </p:ext>
+    </p:extLst>
+  </p:cSld>
+  <p:clrMapOvr>
+    <a:masterClrMapping/>
+  </p:clrMapOvr>
+</p:sld>
+</file>
+
+<file path=ppt/slides/slide20.xml><?xml version="1.0" encoding="utf-8"?>
 <p:sld xmlns:a="http://schemas.openxmlformats.org/drawingml/2006/main" xmlns:r="http://schemas.openxmlformats.org/officeDocument/2006/relationships" xmlns:p="http://schemas.openxmlformats.org/presentationml/2006/main">
   <p:cSld>
     <p:spTree>
@@ -9718,7 +9894,122 @@
 </p:sld>
 </file>
 
-<file path=ppt/slides/slide2.xml><?xml version="1.0" encoding="utf-8"?>
+<file path=ppt/slides/slide21.xml><?xml version="1.0" encoding="utf-8"?>
+<p:sld xmlns:a="http://schemas.openxmlformats.org/drawingml/2006/main" xmlns:r="http://schemas.openxmlformats.org/officeDocument/2006/relationships" xmlns:p="http://schemas.openxmlformats.org/presentationml/2006/main">
+  <p:cSld>
+    <p:spTree>
+      <p:nvGrpSpPr>
+        <p:cNvPr id="1" name=""/>
+        <p:cNvGrpSpPr/>
+        <p:nvPr/>
+      </p:nvGrpSpPr>
+      <p:grpSpPr>
+        <a:xfrm>
+          <a:off x="0" y="0"/>
+          <a:ext cx="0" cy="0"/>
+          <a:chOff x="0" y="0"/>
+          <a:chExt cx="0" cy="0"/>
+        </a:xfrm>
+      </p:grpSpPr>
+      <p:sp>
+        <p:nvSpPr>
+          <p:cNvPr id="4" name="제목 3">
+            <a:extLst>
+              <a:ext uri="{FF2B5EF4-FFF2-40B4-BE49-F238E27FC236}">
+                <a16:creationId xmlns:a16="http://schemas.microsoft.com/office/drawing/2014/main" id="{AA6C3C0E-F24F-9763-AC2A-545FB7F3873E}"/>
+              </a:ext>
+            </a:extLst>
+          </p:cNvPr>
+          <p:cNvSpPr>
+            <a:spLocks noGrp="1"/>
+          </p:cNvSpPr>
+          <p:nvPr>
+            <p:ph type="ctrTitle"/>
+          </p:nvPr>
+        </p:nvSpPr>
+        <p:spPr/>
+        <p:txBody>
+          <a:bodyPr/>
+          <a:lstStyle/>
+          <a:p>
+            <a:r>
+              <a:rPr lang="ko-KR" altLang="en-US" dirty="0"/>
+              <a:t>구현 실습</a:t>
+            </a:r>
+          </a:p>
+        </p:txBody>
+      </p:sp>
+      <p:sp>
+        <p:nvSpPr>
+          <p:cNvPr id="5" name="부제목 4">
+            <a:extLst>
+              <a:ext uri="{FF2B5EF4-FFF2-40B4-BE49-F238E27FC236}">
+                <a16:creationId xmlns:a16="http://schemas.microsoft.com/office/drawing/2014/main" id="{CAF74D28-A379-C9BB-D8F9-E3B6A7427E89}"/>
+              </a:ext>
+            </a:extLst>
+          </p:cNvPr>
+          <p:cNvSpPr>
+            <a:spLocks noGrp="1"/>
+          </p:cNvSpPr>
+          <p:nvPr>
+            <p:ph type="subTitle" idx="1"/>
+          </p:nvPr>
+        </p:nvSpPr>
+        <p:spPr/>
+        <p:txBody>
+          <a:bodyPr/>
+          <a:lstStyle/>
+          <a:p>
+            <a:pPr marL="0" indent="0" algn="r">
+              <a:buNone/>
+            </a:pPr>
+            <a:r>
+              <a:rPr lang="en-US" altLang="ko-KR" dirty="0"/>
+              <a:t>Distributed Lock</a:t>
+            </a:r>
+            <a:endParaRPr lang="ko-KR" altLang="en-US" dirty="0"/>
+          </a:p>
+        </p:txBody>
+      </p:sp>
+      <p:sp>
+        <p:nvSpPr>
+          <p:cNvPr id="2" name="텍스트 개체 틀 1">
+            <a:extLst>
+              <a:ext uri="{FF2B5EF4-FFF2-40B4-BE49-F238E27FC236}">
+                <a16:creationId xmlns:a16="http://schemas.microsoft.com/office/drawing/2014/main" id="{C98CEAC1-EA64-0C03-8B0C-9BECB950A552}"/>
+              </a:ext>
+            </a:extLst>
+          </p:cNvPr>
+          <p:cNvSpPr>
+            <a:spLocks noGrp="1"/>
+          </p:cNvSpPr>
+          <p:nvPr>
+            <p:ph type="body" sz="quarter" idx="10"/>
+          </p:nvPr>
+        </p:nvSpPr>
+        <p:spPr/>
+        <p:txBody>
+          <a:bodyPr/>
+          <a:lstStyle/>
+          <a:p>
+            <a:endParaRPr lang="ko-KR" altLang="en-US"/>
+          </a:p>
+        </p:txBody>
+      </p:sp>
+    </p:spTree>
+    <p:extLst>
+      <p:ext uri="{BB962C8B-B14F-4D97-AF65-F5344CB8AC3E}">
+        <p14:creationId xmlns:p14="http://schemas.microsoft.com/office/powerpoint/2010/main" val="4005433968"/>
+      </p:ext>
+    </p:extLst>
+  </p:cSld>
+  <p:clrMapOvr>
+    <a:masterClrMapping/>
+  </p:clrMapOvr>
+</p:sld>
+</file>
+
+<file path=ppt/slides/slide3.xml><?xml version="1.0" encoding="utf-8"?>
 <p:sld xmlns:a="http://schemas.openxmlformats.org/drawingml/2006/main" xmlns:r="http://schemas.openxmlformats.org/officeDocument/2006/relationships" xmlns:p="http://schemas.openxmlformats.org/presentationml/2006/main">
   <p:cSld>
     <p:spTree>
@@ -10325,239 +10616,6 @@
 </p:sld>
 </file>
 
-<file path=ppt/slides/slide20.xml><?xml version="1.0" encoding="utf-8"?>
-<p:sld xmlns:a="http://schemas.openxmlformats.org/drawingml/2006/main" xmlns:r="http://schemas.openxmlformats.org/officeDocument/2006/relationships" xmlns:p="http://schemas.openxmlformats.org/presentationml/2006/main">
-  <p:cSld>
-    <p:spTree>
-      <p:nvGrpSpPr>
-        <p:cNvPr id="1" name=""/>
-        <p:cNvGrpSpPr/>
-        <p:nvPr/>
-      </p:nvGrpSpPr>
-      <p:grpSpPr>
-        <a:xfrm>
-          <a:off x="0" y="0"/>
-          <a:ext cx="0" cy="0"/>
-          <a:chOff x="0" y="0"/>
-          <a:chExt cx="0" cy="0"/>
-        </a:xfrm>
-      </p:grpSpPr>
-      <p:sp>
-        <p:nvSpPr>
-          <p:cNvPr id="4" name="제목 3">
-            <a:extLst>
-              <a:ext uri="{FF2B5EF4-FFF2-40B4-BE49-F238E27FC236}">
-                <a16:creationId xmlns:a16="http://schemas.microsoft.com/office/drawing/2014/main" id="{AA6C3C0E-F24F-9763-AC2A-545FB7F3873E}"/>
-              </a:ext>
-            </a:extLst>
-          </p:cNvPr>
-          <p:cNvSpPr>
-            <a:spLocks noGrp="1"/>
-          </p:cNvSpPr>
-          <p:nvPr>
-            <p:ph type="ctrTitle"/>
-          </p:nvPr>
-        </p:nvSpPr>
-        <p:spPr/>
-        <p:txBody>
-          <a:bodyPr/>
-          <a:lstStyle/>
-          <a:p>
-            <a:r>
-              <a:rPr lang="ko-KR" altLang="en-US" dirty="0"/>
-              <a:t>구현 실습</a:t>
-            </a:r>
-          </a:p>
-        </p:txBody>
-      </p:sp>
-      <p:sp>
-        <p:nvSpPr>
-          <p:cNvPr id="5" name="부제목 4">
-            <a:extLst>
-              <a:ext uri="{FF2B5EF4-FFF2-40B4-BE49-F238E27FC236}">
-                <a16:creationId xmlns:a16="http://schemas.microsoft.com/office/drawing/2014/main" id="{CAF74D28-A379-C9BB-D8F9-E3B6A7427E89}"/>
-              </a:ext>
-            </a:extLst>
-          </p:cNvPr>
-          <p:cNvSpPr>
-            <a:spLocks noGrp="1"/>
-          </p:cNvSpPr>
-          <p:nvPr>
-            <p:ph type="subTitle" idx="1"/>
-          </p:nvPr>
-        </p:nvSpPr>
-        <p:spPr/>
-        <p:txBody>
-          <a:bodyPr/>
-          <a:lstStyle/>
-          <a:p>
-            <a:pPr marL="0" indent="0" algn="r">
-              <a:buNone/>
-            </a:pPr>
-            <a:r>
-              <a:rPr lang="en-US" altLang="ko-KR" dirty="0"/>
-              <a:t>Distributed Lock</a:t>
-            </a:r>
-            <a:endParaRPr lang="ko-KR" altLang="en-US" dirty="0"/>
-          </a:p>
-        </p:txBody>
-      </p:sp>
-      <p:sp>
-        <p:nvSpPr>
-          <p:cNvPr id="2" name="텍스트 개체 틀 1">
-            <a:extLst>
-              <a:ext uri="{FF2B5EF4-FFF2-40B4-BE49-F238E27FC236}">
-                <a16:creationId xmlns:a16="http://schemas.microsoft.com/office/drawing/2014/main" id="{C98CEAC1-EA64-0C03-8B0C-9BECB950A552}"/>
-              </a:ext>
-            </a:extLst>
-          </p:cNvPr>
-          <p:cNvSpPr>
-            <a:spLocks noGrp="1"/>
-          </p:cNvSpPr>
-          <p:nvPr>
-            <p:ph type="body" sz="quarter" idx="10"/>
-          </p:nvPr>
-        </p:nvSpPr>
-        <p:spPr/>
-        <p:txBody>
-          <a:bodyPr/>
-          <a:lstStyle/>
-          <a:p>
-            <a:endParaRPr lang="ko-KR" altLang="en-US"/>
-          </a:p>
-        </p:txBody>
-      </p:sp>
-    </p:spTree>
-    <p:extLst>
-      <p:ext uri="{BB962C8B-B14F-4D97-AF65-F5344CB8AC3E}">
-        <p14:creationId xmlns:p14="http://schemas.microsoft.com/office/powerpoint/2010/main" val="4005433968"/>
-      </p:ext>
-    </p:extLst>
-  </p:cSld>
-  <p:clrMapOvr>
-    <a:masterClrMapping/>
-  </p:clrMapOvr>
-</p:sld>
-</file>
-
-<file path=ppt/slides/slide3.xml><?xml version="1.0" encoding="utf-8"?>
-<p:sld xmlns:a="http://schemas.openxmlformats.org/drawingml/2006/main" xmlns:r="http://schemas.openxmlformats.org/officeDocument/2006/relationships" xmlns:p="http://schemas.openxmlformats.org/presentationml/2006/main">
-  <p:cSld>
-    <p:spTree>
-      <p:nvGrpSpPr>
-        <p:cNvPr id="1" name=""/>
-        <p:cNvGrpSpPr/>
-        <p:nvPr/>
-      </p:nvGrpSpPr>
-      <p:grpSpPr>
-        <a:xfrm>
-          <a:off x="0" y="0"/>
-          <a:ext cx="0" cy="0"/>
-          <a:chOff x="0" y="0"/>
-          <a:chExt cx="0" cy="0"/>
-        </a:xfrm>
-      </p:grpSpPr>
-      <p:sp>
-        <p:nvSpPr>
-          <p:cNvPr id="4" name="제목 3">
-            <a:extLst>
-              <a:ext uri="{FF2B5EF4-FFF2-40B4-BE49-F238E27FC236}">
-                <a16:creationId xmlns:a16="http://schemas.microsoft.com/office/drawing/2014/main" id="{AA6C3C0E-F24F-9763-AC2A-545FB7F3873E}"/>
-              </a:ext>
-            </a:extLst>
-          </p:cNvPr>
-          <p:cNvSpPr>
-            <a:spLocks noGrp="1"/>
-          </p:cNvSpPr>
-          <p:nvPr>
-            <p:ph type="ctrTitle"/>
-          </p:nvPr>
-        </p:nvSpPr>
-        <p:spPr/>
-        <p:txBody>
-          <a:bodyPr/>
-          <a:lstStyle/>
-          <a:p>
-            <a:r>
-              <a:rPr lang="ko-KR" altLang="en-US" dirty="0"/>
-              <a:t>구현 실습</a:t>
-            </a:r>
-          </a:p>
-        </p:txBody>
-      </p:sp>
-      <p:sp>
-        <p:nvSpPr>
-          <p:cNvPr id="5" name="부제목 4">
-            <a:extLst>
-              <a:ext uri="{FF2B5EF4-FFF2-40B4-BE49-F238E27FC236}">
-                <a16:creationId xmlns:a16="http://schemas.microsoft.com/office/drawing/2014/main" id="{CAF74D28-A379-C9BB-D8F9-E3B6A7427E89}"/>
-              </a:ext>
-            </a:extLst>
-          </p:cNvPr>
-          <p:cNvSpPr>
-            <a:spLocks noGrp="1"/>
-          </p:cNvSpPr>
-          <p:nvPr>
-            <p:ph type="subTitle" idx="1"/>
-          </p:nvPr>
-        </p:nvSpPr>
-        <p:spPr/>
-        <p:txBody>
-          <a:bodyPr/>
-          <a:lstStyle/>
-          <a:p>
-            <a:pPr marL="0" indent="0" algn="r">
-              <a:buNone/>
-            </a:pPr>
-            <a:r>
-              <a:rPr lang="en-US" altLang="ko-KR" dirty="0"/>
-              <a:t>Trace ID logging </a:t>
-            </a:r>
-            <a:r>
-              <a:rPr lang="ko-KR" altLang="en-US" dirty="0"/>
-              <a:t>구현</a:t>
-            </a:r>
-          </a:p>
-        </p:txBody>
-      </p:sp>
-      <p:sp>
-        <p:nvSpPr>
-          <p:cNvPr id="2" name="텍스트 개체 틀 1">
-            <a:extLst>
-              <a:ext uri="{FF2B5EF4-FFF2-40B4-BE49-F238E27FC236}">
-                <a16:creationId xmlns:a16="http://schemas.microsoft.com/office/drawing/2014/main" id="{27A5EFCE-88AD-A8AE-9B7F-E85DC4DFD722}"/>
-              </a:ext>
-            </a:extLst>
-          </p:cNvPr>
-          <p:cNvSpPr>
-            <a:spLocks noGrp="1"/>
-          </p:cNvSpPr>
-          <p:nvPr>
-            <p:ph type="body" sz="quarter" idx="10"/>
-          </p:nvPr>
-        </p:nvSpPr>
-        <p:spPr/>
-        <p:txBody>
-          <a:bodyPr/>
-          <a:lstStyle/>
-          <a:p>
-            <a:endParaRPr lang="ko-KR" altLang="en-US"/>
-          </a:p>
-        </p:txBody>
-      </p:sp>
-    </p:spTree>
-    <p:extLst>
-      <p:ext uri="{BB962C8B-B14F-4D97-AF65-F5344CB8AC3E}">
-        <p14:creationId xmlns:p14="http://schemas.microsoft.com/office/powerpoint/2010/main" val="3878263524"/>
-      </p:ext>
-    </p:extLst>
-  </p:cSld>
-  <p:clrMapOvr>
-    <a:masterClrMapping/>
-  </p:clrMapOvr>
-</p:sld>
-</file>
-
 <file path=ppt/slides/slide4.xml><?xml version="1.0" encoding="utf-8"?>
 <p:sld xmlns:a="http://schemas.openxmlformats.org/drawingml/2006/main" xmlns:r="http://schemas.openxmlformats.org/officeDocument/2006/relationships" xmlns:p="http://schemas.openxmlformats.org/presentationml/2006/main">
   <p:cSld>
@@ -10577,10 +10635,10 @@
       </p:grpSpPr>
       <p:sp>
         <p:nvSpPr>
-          <p:cNvPr id="2" name="제목 1">
+          <p:cNvPr id="4" name="제목 3">
             <a:extLst>
               <a:ext uri="{FF2B5EF4-FFF2-40B4-BE49-F238E27FC236}">
-                <a16:creationId xmlns:a16="http://schemas.microsoft.com/office/drawing/2014/main" id="{9896B29B-A1AE-E0C6-8543-753E63140B1C}"/>
+                <a16:creationId xmlns:a16="http://schemas.microsoft.com/office/drawing/2014/main" id="{AA6C3C0E-F24F-9763-AC2A-545FB7F3873E}"/>
               </a:ext>
             </a:extLst>
           </p:cNvPr>
@@ -10593,24 +10651,22 @@
         </p:nvSpPr>
         <p:spPr/>
         <p:txBody>
-          <a:bodyPr>
-            <a:normAutofit/>
-          </a:bodyPr>
+          <a:bodyPr/>
           <a:lstStyle/>
           <a:p>
             <a:r>
-              <a:rPr lang="ko-KR" altLang="en-US" b="1" dirty="0"/>
-              <a:t>실무형 심화개발</a:t>
-            </a:r>
-          </a:p>
-        </p:txBody>
-      </p:sp>
-      <p:sp>
-        <p:nvSpPr>
-          <p:cNvPr id="4" name="부제목 3">
+              <a:rPr lang="ko-KR" altLang="en-US" dirty="0"/>
+              <a:t>구현 실습</a:t>
+            </a:r>
+          </a:p>
+        </p:txBody>
+      </p:sp>
+      <p:sp>
+        <p:nvSpPr>
+          <p:cNvPr id="5" name="부제목 4">
             <a:extLst>
               <a:ext uri="{FF2B5EF4-FFF2-40B4-BE49-F238E27FC236}">
-                <a16:creationId xmlns:a16="http://schemas.microsoft.com/office/drawing/2014/main" id="{7219E4B9-47F6-C7CA-B046-1256225C3574}"/>
+                <a16:creationId xmlns:a16="http://schemas.microsoft.com/office/drawing/2014/main" id="{CAF74D28-A379-C9BB-D8F9-E3B6A7427E89}"/>
               </a:ext>
             </a:extLst>
           </p:cNvPr>
@@ -10623,44 +10679,29 @@
         </p:nvSpPr>
         <p:spPr/>
         <p:txBody>
-          <a:bodyPr>
-            <a:normAutofit/>
-          </a:bodyPr>
+          <a:bodyPr/>
           <a:lstStyle/>
           <a:p>
             <a:pPr marL="0" indent="0" algn="r">
               <a:buNone/>
             </a:pPr>
             <a:r>
-              <a:rPr lang="en-US" altLang="ko" b="1" dirty="0">
-                <a:solidFill>
-                  <a:srgbClr val="ED234B"/>
-                </a:solidFill>
-              </a:rPr>
-              <a:t>2</a:t>
-            </a:r>
-            <a:r>
-              <a:rPr lang="ko" altLang="ko-KR" b="1" dirty="0">
-                <a:solidFill>
-                  <a:srgbClr val="ED234B"/>
-                </a:solidFill>
-              </a:rPr>
-              <a:t> </a:t>
-            </a:r>
-            <a:r>
-              <a:rPr lang="en-US" altLang="ko-KR" dirty="0"/>
-              <a:t>Error handling</a:t>
-            </a:r>
-            <a:endParaRPr lang="ko-KR" altLang="en-US" dirty="0"/>
-          </a:p>
-        </p:txBody>
-      </p:sp>
-      <p:sp>
-        <p:nvSpPr>
-          <p:cNvPr id="3" name="텍스트 개체 틀 2">
+              <a:rPr lang="en-US" altLang="ko-KR" dirty="0"/>
+              <a:t>Trace ID logging </a:t>
+            </a:r>
+            <a:r>
+              <a:rPr lang="ko-KR" altLang="en-US" dirty="0"/>
+              <a:t>구현</a:t>
+            </a:r>
+          </a:p>
+        </p:txBody>
+      </p:sp>
+      <p:sp>
+        <p:nvSpPr>
+          <p:cNvPr id="2" name="텍스트 개체 틀 1">
             <a:extLst>
               <a:ext uri="{FF2B5EF4-FFF2-40B4-BE49-F238E27FC236}">
-                <a16:creationId xmlns:a16="http://schemas.microsoft.com/office/drawing/2014/main" id="{C9A5FD37-61AB-DE2A-CA2B-AB821AE62544}"/>
+                <a16:creationId xmlns:a16="http://schemas.microsoft.com/office/drawing/2014/main" id="{27A5EFCE-88AD-A8AE-9B7F-E85DC4DFD722}"/>
               </a:ext>
             </a:extLst>
           </p:cNvPr>
@@ -10683,7 +10724,7 @@
     </p:spTree>
     <p:extLst>
       <p:ext uri="{BB962C8B-B14F-4D97-AF65-F5344CB8AC3E}">
-        <p14:creationId xmlns:p14="http://schemas.microsoft.com/office/powerpoint/2010/main" val="80618887"/>
+        <p14:creationId xmlns:p14="http://schemas.microsoft.com/office/powerpoint/2010/main" val="3878263524"/>
       </p:ext>
     </p:extLst>
   </p:cSld>
@@ -10712,10 +10753,10 @@
       </p:grpSpPr>
       <p:sp>
         <p:nvSpPr>
-          <p:cNvPr id="4" name="제목 3">
+          <p:cNvPr id="2" name="제목 1">
             <a:extLst>
               <a:ext uri="{FF2B5EF4-FFF2-40B4-BE49-F238E27FC236}">
-                <a16:creationId xmlns:a16="http://schemas.microsoft.com/office/drawing/2014/main" id="{AA6C3C0E-F24F-9763-AC2A-545FB7F3873E}"/>
+                <a16:creationId xmlns:a16="http://schemas.microsoft.com/office/drawing/2014/main" id="{9896B29B-A1AE-E0C6-8543-753E63140B1C}"/>
               </a:ext>
             </a:extLst>
           </p:cNvPr>
@@ -10728,22 +10769,24 @@
         </p:nvSpPr>
         <p:spPr/>
         <p:txBody>
-          <a:bodyPr/>
+          <a:bodyPr>
+            <a:normAutofit/>
+          </a:bodyPr>
           <a:lstStyle/>
           <a:p>
             <a:r>
-              <a:rPr lang="ko-KR" altLang="en-US" dirty="0"/>
-              <a:t>구현 실습</a:t>
-            </a:r>
-          </a:p>
-        </p:txBody>
-      </p:sp>
-      <p:sp>
-        <p:nvSpPr>
-          <p:cNvPr id="5" name="부제목 4">
+              <a:rPr lang="ko-KR" altLang="en-US" b="1" dirty="0"/>
+              <a:t>실무형 심화개발</a:t>
+            </a:r>
+          </a:p>
+        </p:txBody>
+      </p:sp>
+      <p:sp>
+        <p:nvSpPr>
+          <p:cNvPr id="4" name="부제목 3">
             <a:extLst>
               <a:ext uri="{FF2B5EF4-FFF2-40B4-BE49-F238E27FC236}">
-                <a16:creationId xmlns:a16="http://schemas.microsoft.com/office/drawing/2014/main" id="{CAF74D28-A379-C9BB-D8F9-E3B6A7427E89}"/>
+                <a16:creationId xmlns:a16="http://schemas.microsoft.com/office/drawing/2014/main" id="{7219E4B9-47F6-C7CA-B046-1256225C3574}"/>
               </a:ext>
             </a:extLst>
           </p:cNvPr>
@@ -10756,29 +10799,44 @@
         </p:nvSpPr>
         <p:spPr/>
         <p:txBody>
-          <a:bodyPr/>
+          <a:bodyPr>
+            <a:normAutofit/>
+          </a:bodyPr>
           <a:lstStyle/>
           <a:p>
             <a:pPr marL="0" indent="0" algn="r">
               <a:buNone/>
             </a:pPr>
             <a:r>
-              <a:rPr lang="en-US" altLang="ko-KR" dirty="0"/>
-              <a:t>Error Handler </a:t>
-            </a:r>
-            <a:r>
-              <a:rPr lang="ko-KR" altLang="en-US" dirty="0"/>
-              <a:t>구현</a:t>
-            </a:r>
-          </a:p>
-        </p:txBody>
-      </p:sp>
-      <p:sp>
-        <p:nvSpPr>
-          <p:cNvPr id="2" name="텍스트 개체 틀 1">
+              <a:rPr lang="en-US" altLang="ko" b="1" dirty="0">
+                <a:solidFill>
+                  <a:srgbClr val="ED234B"/>
+                </a:solidFill>
+              </a:rPr>
+              <a:t>2</a:t>
+            </a:r>
+            <a:r>
+              <a:rPr lang="ko" altLang="ko-KR" b="1" dirty="0">
+                <a:solidFill>
+                  <a:srgbClr val="ED234B"/>
+                </a:solidFill>
+              </a:rPr>
+              <a:t> </a:t>
+            </a:r>
+            <a:r>
+              <a:rPr lang="en-US" altLang="ko-KR" dirty="0"/>
+              <a:t>Error handling</a:t>
+            </a:r>
+            <a:endParaRPr lang="ko-KR" altLang="en-US" dirty="0"/>
+          </a:p>
+        </p:txBody>
+      </p:sp>
+      <p:sp>
+        <p:nvSpPr>
+          <p:cNvPr id="3" name="텍스트 개체 틀 2">
             <a:extLst>
               <a:ext uri="{FF2B5EF4-FFF2-40B4-BE49-F238E27FC236}">
-                <a16:creationId xmlns:a16="http://schemas.microsoft.com/office/drawing/2014/main" id="{E06FC4B5-F7C2-A9B8-8F91-225556F7B8F7}"/>
+                <a16:creationId xmlns:a16="http://schemas.microsoft.com/office/drawing/2014/main" id="{C9A5FD37-61AB-DE2A-CA2B-AB821AE62544}"/>
               </a:ext>
             </a:extLst>
           </p:cNvPr>
@@ -10801,7 +10859,7 @@
     </p:spTree>
     <p:extLst>
       <p:ext uri="{BB962C8B-B14F-4D97-AF65-F5344CB8AC3E}">
-        <p14:creationId xmlns:p14="http://schemas.microsoft.com/office/powerpoint/2010/main" val="1397940219"/>
+        <p14:creationId xmlns:p14="http://schemas.microsoft.com/office/powerpoint/2010/main" val="80618887"/>
       </p:ext>
     </p:extLst>
   </p:cSld>
@@ -10830,10 +10888,10 @@
       </p:grpSpPr>
       <p:sp>
         <p:nvSpPr>
-          <p:cNvPr id="2" name="제목 1">
+          <p:cNvPr id="4" name="제목 3">
             <a:extLst>
               <a:ext uri="{FF2B5EF4-FFF2-40B4-BE49-F238E27FC236}">
-                <a16:creationId xmlns:a16="http://schemas.microsoft.com/office/drawing/2014/main" id="{9896B29B-A1AE-E0C6-8543-753E63140B1C}"/>
+                <a16:creationId xmlns:a16="http://schemas.microsoft.com/office/drawing/2014/main" id="{AA6C3C0E-F24F-9763-AC2A-545FB7F3873E}"/>
               </a:ext>
             </a:extLst>
           </p:cNvPr>
@@ -10846,24 +10904,22 @@
         </p:nvSpPr>
         <p:spPr/>
         <p:txBody>
-          <a:bodyPr>
-            <a:normAutofit/>
-          </a:bodyPr>
+          <a:bodyPr/>
           <a:lstStyle/>
           <a:p>
             <a:r>
-              <a:rPr lang="ko-KR" altLang="en-US" b="1" dirty="0"/>
-              <a:t>실무형 심화개발</a:t>
-            </a:r>
-          </a:p>
-        </p:txBody>
-      </p:sp>
-      <p:sp>
-        <p:nvSpPr>
-          <p:cNvPr id="4" name="부제목 3">
+              <a:rPr lang="ko-KR" altLang="en-US" dirty="0"/>
+              <a:t>구현 실습</a:t>
+            </a:r>
+          </a:p>
+        </p:txBody>
+      </p:sp>
+      <p:sp>
+        <p:nvSpPr>
+          <p:cNvPr id="5" name="부제목 4">
             <a:extLst>
               <a:ext uri="{FF2B5EF4-FFF2-40B4-BE49-F238E27FC236}">
-                <a16:creationId xmlns:a16="http://schemas.microsoft.com/office/drawing/2014/main" id="{7219E4B9-47F6-C7CA-B046-1256225C3574}"/>
+                <a16:creationId xmlns:a16="http://schemas.microsoft.com/office/drawing/2014/main" id="{CAF74D28-A379-C9BB-D8F9-E3B6A7427E89}"/>
               </a:ext>
             </a:extLst>
           </p:cNvPr>
@@ -10876,44 +10932,29 @@
         </p:nvSpPr>
         <p:spPr/>
         <p:txBody>
-          <a:bodyPr>
-            <a:normAutofit/>
-          </a:bodyPr>
+          <a:bodyPr/>
           <a:lstStyle/>
           <a:p>
             <a:pPr marL="0" indent="0" algn="r">
               <a:buNone/>
             </a:pPr>
             <a:r>
-              <a:rPr lang="en-US" altLang="ko" b="1" dirty="0">
-                <a:solidFill>
-                  <a:srgbClr val="ED234B"/>
-                </a:solidFill>
-              </a:rPr>
-              <a:t>3</a:t>
-            </a:r>
-            <a:r>
-              <a:rPr lang="ko" altLang="ko-KR" b="1" dirty="0">
-                <a:solidFill>
-                  <a:srgbClr val="ED234B"/>
-                </a:solidFill>
-              </a:rPr>
-              <a:t> </a:t>
-            </a:r>
-            <a:r>
-              <a:rPr lang="en-US" altLang="ko-KR" dirty="0"/>
-              <a:t>Request payload logging</a:t>
-            </a:r>
-            <a:endParaRPr lang="ko-KR" altLang="en-US" dirty="0"/>
-          </a:p>
-        </p:txBody>
-      </p:sp>
-      <p:sp>
-        <p:nvSpPr>
-          <p:cNvPr id="3" name="텍스트 개체 틀 2">
+              <a:rPr lang="en-US" altLang="ko-KR" dirty="0"/>
+              <a:t>Error Handler </a:t>
+            </a:r>
+            <a:r>
+              <a:rPr lang="ko-KR" altLang="en-US" dirty="0"/>
+              <a:t>구현</a:t>
+            </a:r>
+          </a:p>
+        </p:txBody>
+      </p:sp>
+      <p:sp>
+        <p:nvSpPr>
+          <p:cNvPr id="2" name="텍스트 개체 틀 1">
             <a:extLst>
               <a:ext uri="{FF2B5EF4-FFF2-40B4-BE49-F238E27FC236}">
-                <a16:creationId xmlns:a16="http://schemas.microsoft.com/office/drawing/2014/main" id="{D08A548F-C7A9-9795-F803-4AC1ED121C37}"/>
+                <a16:creationId xmlns:a16="http://schemas.microsoft.com/office/drawing/2014/main" id="{E06FC4B5-F7C2-A9B8-8F91-225556F7B8F7}"/>
               </a:ext>
             </a:extLst>
           </p:cNvPr>
@@ -10936,7 +10977,7 @@
     </p:spTree>
     <p:extLst>
       <p:ext uri="{BB962C8B-B14F-4D97-AF65-F5344CB8AC3E}">
-        <p14:creationId xmlns:p14="http://schemas.microsoft.com/office/powerpoint/2010/main" val="1440033713"/>
+        <p14:creationId xmlns:p14="http://schemas.microsoft.com/office/powerpoint/2010/main" val="1397940219"/>
       </p:ext>
     </p:extLst>
   </p:cSld>
@@ -10965,10 +11006,10 @@
       </p:grpSpPr>
       <p:sp>
         <p:nvSpPr>
-          <p:cNvPr id="4" name="제목 3">
+          <p:cNvPr id="2" name="제목 1">
             <a:extLst>
               <a:ext uri="{FF2B5EF4-FFF2-40B4-BE49-F238E27FC236}">
-                <a16:creationId xmlns:a16="http://schemas.microsoft.com/office/drawing/2014/main" id="{AA6C3C0E-F24F-9763-AC2A-545FB7F3873E}"/>
+                <a16:creationId xmlns:a16="http://schemas.microsoft.com/office/drawing/2014/main" id="{9896B29B-A1AE-E0C6-8543-753E63140B1C}"/>
               </a:ext>
             </a:extLst>
           </p:cNvPr>
@@ -10981,22 +11022,24 @@
         </p:nvSpPr>
         <p:spPr/>
         <p:txBody>
-          <a:bodyPr/>
+          <a:bodyPr>
+            <a:normAutofit/>
+          </a:bodyPr>
           <a:lstStyle/>
           <a:p>
             <a:r>
-              <a:rPr lang="ko-KR" altLang="en-US" dirty="0"/>
-              <a:t>구현 실습</a:t>
-            </a:r>
-          </a:p>
-        </p:txBody>
-      </p:sp>
-      <p:sp>
-        <p:nvSpPr>
-          <p:cNvPr id="5" name="부제목 4">
+              <a:rPr lang="ko-KR" altLang="en-US" b="1" dirty="0"/>
+              <a:t>실무형 심화개발</a:t>
+            </a:r>
+          </a:p>
+        </p:txBody>
+      </p:sp>
+      <p:sp>
+        <p:nvSpPr>
+          <p:cNvPr id="4" name="부제목 3">
             <a:extLst>
               <a:ext uri="{FF2B5EF4-FFF2-40B4-BE49-F238E27FC236}">
-                <a16:creationId xmlns:a16="http://schemas.microsoft.com/office/drawing/2014/main" id="{CAF74D28-A379-C9BB-D8F9-E3B6A7427E89}"/>
+                <a16:creationId xmlns:a16="http://schemas.microsoft.com/office/drawing/2014/main" id="{7219E4B9-47F6-C7CA-B046-1256225C3574}"/>
               </a:ext>
             </a:extLst>
           </p:cNvPr>
@@ -11009,23 +11052,33 @@
         </p:nvSpPr>
         <p:spPr/>
         <p:txBody>
-          <a:bodyPr/>
+          <a:bodyPr>
+            <a:normAutofit/>
+          </a:bodyPr>
           <a:lstStyle/>
           <a:p>
             <a:pPr marL="0" indent="0" algn="r">
               <a:buNone/>
             </a:pPr>
             <a:r>
-              <a:rPr lang="en-US" altLang="ko-KR" dirty="0"/>
-              <a:t>Request</a:t>
-            </a:r>
-            <a:r>
-              <a:rPr lang="ko-KR" altLang="en-US" dirty="0"/>
+              <a:rPr lang="en-US" altLang="ko" b="1" dirty="0">
+                <a:solidFill>
+                  <a:srgbClr val="ED234B"/>
+                </a:solidFill>
+              </a:rPr>
+              <a:t>3</a:t>
+            </a:r>
+            <a:r>
+              <a:rPr lang="ko" altLang="ko-KR" b="1" dirty="0">
+                <a:solidFill>
+                  <a:srgbClr val="ED234B"/>
+                </a:solidFill>
+              </a:rPr>
               <a:t> </a:t>
             </a:r>
             <a:r>
               <a:rPr lang="en-US" altLang="ko-KR" dirty="0"/>
-              <a:t>parameter logging</a:t>
+              <a:t>Request payload logging</a:t>
             </a:r>
             <a:endParaRPr lang="ko-KR" altLang="en-US" dirty="0"/>
           </a:p>
@@ -11033,10 +11086,10 @@
       </p:sp>
       <p:sp>
         <p:nvSpPr>
-          <p:cNvPr id="2" name="텍스트 개체 틀 1">
+          <p:cNvPr id="3" name="텍스트 개체 틀 2">
             <a:extLst>
               <a:ext uri="{FF2B5EF4-FFF2-40B4-BE49-F238E27FC236}">
-                <a16:creationId xmlns:a16="http://schemas.microsoft.com/office/drawing/2014/main" id="{11133A34-4CB5-9B5F-8BA2-7C571DC51008}"/>
+                <a16:creationId xmlns:a16="http://schemas.microsoft.com/office/drawing/2014/main" id="{D08A548F-C7A9-9795-F803-4AC1ED121C37}"/>
               </a:ext>
             </a:extLst>
           </p:cNvPr>
@@ -11059,7 +11112,7 @@
     </p:spTree>
     <p:extLst>
       <p:ext uri="{BB962C8B-B14F-4D97-AF65-F5344CB8AC3E}">
-        <p14:creationId xmlns:p14="http://schemas.microsoft.com/office/powerpoint/2010/main" val="3270282424"/>
+        <p14:creationId xmlns:p14="http://schemas.microsoft.com/office/powerpoint/2010/main" val="1440033713"/>
       </p:ext>
     </p:extLst>
   </p:cSld>
@@ -11088,10 +11141,10 @@
       </p:grpSpPr>
       <p:sp>
         <p:nvSpPr>
-          <p:cNvPr id="2" name="제목 1">
+          <p:cNvPr id="4" name="제목 3">
             <a:extLst>
               <a:ext uri="{FF2B5EF4-FFF2-40B4-BE49-F238E27FC236}">
-                <a16:creationId xmlns:a16="http://schemas.microsoft.com/office/drawing/2014/main" id="{9896B29B-A1AE-E0C6-8543-753E63140B1C}"/>
+                <a16:creationId xmlns:a16="http://schemas.microsoft.com/office/drawing/2014/main" id="{AA6C3C0E-F24F-9763-AC2A-545FB7F3873E}"/>
               </a:ext>
             </a:extLst>
           </p:cNvPr>
@@ -11104,24 +11157,22 @@
         </p:nvSpPr>
         <p:spPr/>
         <p:txBody>
-          <a:bodyPr>
-            <a:normAutofit/>
-          </a:bodyPr>
+          <a:bodyPr/>
           <a:lstStyle/>
           <a:p>
             <a:r>
-              <a:rPr lang="ko-KR" altLang="en-US" b="1" dirty="0"/>
-              <a:t>실무형 심화개발</a:t>
-            </a:r>
-          </a:p>
-        </p:txBody>
-      </p:sp>
-      <p:sp>
-        <p:nvSpPr>
-          <p:cNvPr id="4" name="부제목 3">
+              <a:rPr lang="ko-KR" altLang="en-US" dirty="0"/>
+              <a:t>구현 실습</a:t>
+            </a:r>
+          </a:p>
+        </p:txBody>
+      </p:sp>
+      <p:sp>
+        <p:nvSpPr>
+          <p:cNvPr id="5" name="부제목 4">
             <a:extLst>
               <a:ext uri="{FF2B5EF4-FFF2-40B4-BE49-F238E27FC236}">
-                <a16:creationId xmlns:a16="http://schemas.microsoft.com/office/drawing/2014/main" id="{7219E4B9-47F6-C7CA-B046-1256225C3574}"/>
+                <a16:creationId xmlns:a16="http://schemas.microsoft.com/office/drawing/2014/main" id="{CAF74D28-A379-C9BB-D8F9-E3B6A7427E89}"/>
               </a:ext>
             </a:extLst>
           </p:cNvPr>
@@ -11134,33 +11185,23 @@
         </p:nvSpPr>
         <p:spPr/>
         <p:txBody>
-          <a:bodyPr>
-            <a:normAutofit/>
-          </a:bodyPr>
+          <a:bodyPr/>
           <a:lstStyle/>
           <a:p>
             <a:pPr marL="0" indent="0" algn="r">
               <a:buNone/>
             </a:pPr>
             <a:r>
-              <a:rPr lang="en-US" altLang="ko" b="1" dirty="0">
-                <a:solidFill>
-                  <a:srgbClr val="ED234B"/>
-                </a:solidFill>
-              </a:rPr>
-              <a:t>4</a:t>
-            </a:r>
-            <a:r>
-              <a:rPr lang="ko" altLang="ko-KR" b="1" dirty="0">
-                <a:solidFill>
-                  <a:srgbClr val="ED234B"/>
-                </a:solidFill>
-              </a:rPr>
+              <a:rPr lang="en-US" altLang="ko-KR" dirty="0"/>
+              <a:t>Request</a:t>
+            </a:r>
+            <a:r>
+              <a:rPr lang="ko-KR" altLang="en-US" dirty="0"/>
               <a:t> </a:t>
             </a:r>
             <a:r>
               <a:rPr lang="en-US" altLang="ko-KR" dirty="0"/>
-              <a:t>Circuit breaker</a:t>
+              <a:t>parameter logging</a:t>
             </a:r>
             <a:endParaRPr lang="ko-KR" altLang="en-US" dirty="0"/>
           </a:p>
@@ -11168,10 +11209,10 @@
       </p:sp>
       <p:sp>
         <p:nvSpPr>
-          <p:cNvPr id="3" name="텍스트 개체 틀 2">
+          <p:cNvPr id="2" name="텍스트 개체 틀 1">
             <a:extLst>
               <a:ext uri="{FF2B5EF4-FFF2-40B4-BE49-F238E27FC236}">
-                <a16:creationId xmlns:a16="http://schemas.microsoft.com/office/drawing/2014/main" id="{F0E3DB0D-C7AA-65DB-3EAB-473A6D17700E}"/>
+                <a16:creationId xmlns:a16="http://schemas.microsoft.com/office/drawing/2014/main" id="{11133A34-4CB5-9B5F-8BA2-7C571DC51008}"/>
               </a:ext>
             </a:extLst>
           </p:cNvPr>
@@ -11194,7 +11235,7 @@
     </p:spTree>
     <p:extLst>
       <p:ext uri="{BB962C8B-B14F-4D97-AF65-F5344CB8AC3E}">
-        <p14:creationId xmlns:p14="http://schemas.microsoft.com/office/powerpoint/2010/main" val="417457615"/>
+        <p14:creationId xmlns:p14="http://schemas.microsoft.com/office/powerpoint/2010/main" val="3270282424"/>
       </p:ext>
     </p:extLst>
   </p:cSld>
@@ -11223,10 +11264,10 @@
       </p:grpSpPr>
       <p:sp>
         <p:nvSpPr>
-          <p:cNvPr id="4" name="제목 3">
+          <p:cNvPr id="2" name="제목 1">
             <a:extLst>
               <a:ext uri="{FF2B5EF4-FFF2-40B4-BE49-F238E27FC236}">
-                <a16:creationId xmlns:a16="http://schemas.microsoft.com/office/drawing/2014/main" id="{AA6C3C0E-F24F-9763-AC2A-545FB7F3873E}"/>
+                <a16:creationId xmlns:a16="http://schemas.microsoft.com/office/drawing/2014/main" id="{9896B29B-A1AE-E0C6-8543-753E63140B1C}"/>
               </a:ext>
             </a:extLst>
           </p:cNvPr>
@@ -11239,22 +11280,24 @@
         </p:nvSpPr>
         <p:spPr/>
         <p:txBody>
-          <a:bodyPr/>
+          <a:bodyPr>
+            <a:normAutofit/>
+          </a:bodyPr>
           <a:lstStyle/>
           <a:p>
             <a:r>
-              <a:rPr lang="ko-KR" altLang="en-US" dirty="0"/>
-              <a:t>구현 실습</a:t>
-            </a:r>
-          </a:p>
-        </p:txBody>
-      </p:sp>
-      <p:sp>
-        <p:nvSpPr>
-          <p:cNvPr id="5" name="부제목 4">
+              <a:rPr lang="ko-KR" altLang="en-US" b="1" dirty="0"/>
+              <a:t>실무형 심화개발</a:t>
+            </a:r>
+          </a:p>
+        </p:txBody>
+      </p:sp>
+      <p:sp>
+        <p:nvSpPr>
+          <p:cNvPr id="4" name="부제목 3">
             <a:extLst>
               <a:ext uri="{FF2B5EF4-FFF2-40B4-BE49-F238E27FC236}">
-                <a16:creationId xmlns:a16="http://schemas.microsoft.com/office/drawing/2014/main" id="{CAF74D28-A379-C9BB-D8F9-E3B6A7427E89}"/>
+                <a16:creationId xmlns:a16="http://schemas.microsoft.com/office/drawing/2014/main" id="{7219E4B9-47F6-C7CA-B046-1256225C3574}"/>
               </a:ext>
             </a:extLst>
           </p:cNvPr>
@@ -11267,15 +11310,33 @@
         </p:nvSpPr>
         <p:spPr/>
         <p:txBody>
-          <a:bodyPr/>
+          <a:bodyPr>
+            <a:normAutofit/>
+          </a:bodyPr>
           <a:lstStyle/>
           <a:p>
             <a:pPr marL="0" indent="0" algn="r">
               <a:buNone/>
             </a:pPr>
             <a:r>
-              <a:rPr lang="en-US" altLang="ko-KR" dirty="0"/>
-              <a:t>Circuit Breaker</a:t>
+              <a:rPr lang="en-US" altLang="ko" b="1" dirty="0">
+                <a:solidFill>
+                  <a:srgbClr val="ED234B"/>
+                </a:solidFill>
+              </a:rPr>
+              <a:t>4</a:t>
+            </a:r>
+            <a:r>
+              <a:rPr lang="ko" altLang="ko-KR" b="1" dirty="0">
+                <a:solidFill>
+                  <a:srgbClr val="ED234B"/>
+                </a:solidFill>
+              </a:rPr>
+              <a:t> </a:t>
+            </a:r>
+            <a:r>
+              <a:rPr lang="en-US" altLang="ko-KR" dirty="0"/>
+              <a:t>Circuit breaker</a:t>
             </a:r>
             <a:endParaRPr lang="ko-KR" altLang="en-US" dirty="0"/>
           </a:p>
@@ -11283,10 +11344,10 @@
       </p:sp>
       <p:sp>
         <p:nvSpPr>
-          <p:cNvPr id="2" name="텍스트 개체 틀 1">
+          <p:cNvPr id="3" name="텍스트 개체 틀 2">
             <a:extLst>
               <a:ext uri="{FF2B5EF4-FFF2-40B4-BE49-F238E27FC236}">
-                <a16:creationId xmlns:a16="http://schemas.microsoft.com/office/drawing/2014/main" id="{825DCD00-F40B-7E40-E3B4-8B2C7BD450DB}"/>
+                <a16:creationId xmlns:a16="http://schemas.microsoft.com/office/drawing/2014/main" id="{F0E3DB0D-C7AA-65DB-3EAB-473A6D17700E}"/>
               </a:ext>
             </a:extLst>
           </p:cNvPr>
@@ -11309,7 +11370,7 @@
     </p:spTree>
     <p:extLst>
       <p:ext uri="{BB962C8B-B14F-4D97-AF65-F5344CB8AC3E}">
-        <p14:creationId xmlns:p14="http://schemas.microsoft.com/office/powerpoint/2010/main" val="45339774"/>
+        <p14:creationId xmlns:p14="http://schemas.microsoft.com/office/powerpoint/2010/main" val="417457615"/>
       </p:ext>
     </p:extLst>
   </p:cSld>
